--- a/docs/Calculator.pptx
+++ b/docs/Calculator.pptx
@@ -240,7 +240,7 @@
           <a:p>
             <a:fld id="{B7268E1E-0E44-426D-905E-8AD9B19D2182}" type="datetimeFigureOut">
               <a:rPr lang="cs-CZ" smtClean="0"/>
-              <a:t>30.10.2026</a:t>
+              <a:t>02.11.2026</a:t>
             </a:fld>
             <a:endParaRPr lang="cs-CZ"/>
           </a:p>
@@ -1996,7 +1996,7 @@
             <a:fld id="{1D8BD707-D9CF-40AE-B4C6-C98DA3205C09}" type="datetimeFigureOut">
               <a:rPr lang="en-US" smtClean="0"/>
               <a:pPr/>
-              <a:t>10/30/2026</a:t>
+              <a:t>11/2/2026</a:t>
             </a:fld>
             <a:endParaRPr lang="en-US"/>
           </a:p>
@@ -2161,7 +2161,7 @@
             <a:fld id="{1D8BD707-D9CF-40AE-B4C6-C98DA3205C09}" type="datetimeFigureOut">
               <a:rPr lang="en-US" smtClean="0"/>
               <a:pPr/>
-              <a:t>10/30/2026</a:t>
+              <a:t>11/2/2026</a:t>
             </a:fld>
             <a:endParaRPr lang="en-US"/>
           </a:p>
@@ -2336,7 +2336,7 @@
             <a:fld id="{1D8BD707-D9CF-40AE-B4C6-C98DA3205C09}" type="datetimeFigureOut">
               <a:rPr lang="en-US" smtClean="0"/>
               <a:pPr/>
-              <a:t>10/30/2026</a:t>
+              <a:t>11/2/2026</a:t>
             </a:fld>
             <a:endParaRPr lang="en-US"/>
           </a:p>
@@ -2501,7 +2501,7 @@
             <a:fld id="{1D8BD707-D9CF-40AE-B4C6-C98DA3205C09}" type="datetimeFigureOut">
               <a:rPr lang="en-US" smtClean="0"/>
               <a:pPr/>
-              <a:t>10/30/2026</a:t>
+              <a:t>11/2/2026</a:t>
             </a:fld>
             <a:endParaRPr lang="en-US"/>
           </a:p>
@@ -2743,7 +2743,7 @@
             <a:fld id="{1D8BD707-D9CF-40AE-B4C6-C98DA3205C09}" type="datetimeFigureOut">
               <a:rPr lang="en-US" smtClean="0"/>
               <a:pPr/>
-              <a:t>10/30/2026</a:t>
+              <a:t>11/2/2026</a:t>
             </a:fld>
             <a:endParaRPr lang="en-US"/>
           </a:p>
@@ -3025,7 +3025,7 @@
             <a:fld id="{1D8BD707-D9CF-40AE-B4C6-C98DA3205C09}" type="datetimeFigureOut">
               <a:rPr lang="en-US" smtClean="0"/>
               <a:pPr/>
-              <a:t>10/30/2026</a:t>
+              <a:t>11/2/2026</a:t>
             </a:fld>
             <a:endParaRPr lang="en-US"/>
           </a:p>
@@ -3441,7 +3441,7 @@
             <a:fld id="{1D8BD707-D9CF-40AE-B4C6-C98DA3205C09}" type="datetimeFigureOut">
               <a:rPr lang="en-US" smtClean="0"/>
               <a:pPr/>
-              <a:t>10/30/2026</a:t>
+              <a:t>11/2/2026</a:t>
             </a:fld>
             <a:endParaRPr lang="en-US"/>
           </a:p>
@@ -3555,7 +3555,7 @@
             <a:fld id="{1D8BD707-D9CF-40AE-B4C6-C98DA3205C09}" type="datetimeFigureOut">
               <a:rPr lang="en-US" smtClean="0"/>
               <a:pPr/>
-              <a:t>10/30/2026</a:t>
+              <a:t>11/2/2026</a:t>
             </a:fld>
             <a:endParaRPr lang="en-US"/>
           </a:p>
@@ -3647,7 +3647,7 @@
             <a:fld id="{1D8BD707-D9CF-40AE-B4C6-C98DA3205C09}" type="datetimeFigureOut">
               <a:rPr lang="en-US" smtClean="0"/>
               <a:pPr/>
-              <a:t>10/30/2026</a:t>
+              <a:t>11/2/2026</a:t>
             </a:fld>
             <a:endParaRPr lang="en-US"/>
           </a:p>
@@ -3919,7 +3919,7 @@
             <a:fld id="{1D8BD707-D9CF-40AE-B4C6-C98DA3205C09}" type="datetimeFigureOut">
               <a:rPr lang="en-US" smtClean="0"/>
               <a:pPr/>
-              <a:t>10/30/2026</a:t>
+              <a:t>11/2/2026</a:t>
             </a:fld>
             <a:endParaRPr lang="en-US"/>
           </a:p>
@@ -4168,7 +4168,7 @@
             <a:fld id="{1D8BD707-D9CF-40AE-B4C6-C98DA3205C09}" type="datetimeFigureOut">
               <a:rPr lang="en-US" smtClean="0"/>
               <a:pPr/>
-              <a:t>10/30/2026</a:t>
+              <a:t>11/2/2026</a:t>
             </a:fld>
             <a:endParaRPr lang="en-US"/>
           </a:p>
@@ -4376,7 +4376,7 @@
             <a:fld id="{1D8BD707-D9CF-40AE-B4C6-C98DA3205C09}" type="datetimeFigureOut">
               <a:rPr lang="en-US" smtClean="0"/>
               <a:pPr/>
-              <a:t>10/30/2026</a:t>
+              <a:t>11/2/2026</a:t>
             </a:fld>
             <a:endParaRPr lang="en-US"/>
           </a:p>
@@ -6508,7 +6508,7 @@
         </p:nvGrpSpPr>
         <p:grpSpPr>
           <a:xfrm>
-            <a:off x="1354857" y="4463286"/>
+            <a:off x="1354857" y="4402167"/>
             <a:ext cx="523817" cy="523817"/>
             <a:chOff x="0" y="0"/>
             <a:chExt cx="1024128" cy="1024128"/>
@@ -6613,7 +6613,7 @@
         </p:nvGrpSpPr>
         <p:grpSpPr>
           <a:xfrm>
-            <a:off x="1354857" y="5316106"/>
+            <a:off x="1354857" y="5219700"/>
             <a:ext cx="523817" cy="523817"/>
             <a:chOff x="0" y="0"/>
             <a:chExt cx="1024128" cy="1024128"/>
@@ -6901,7 +6901,7 @@
         </p:nvSpPr>
         <p:spPr>
           <a:xfrm>
-            <a:off x="2286000" y="4376579"/>
+            <a:off x="2286000" y="4315460"/>
             <a:ext cx="8009930" cy="675640"/>
           </a:xfrm>
           <a:prstGeom prst="rect">
@@ -6929,7 +6929,7 @@
                 <a:cs typeface="Times New Roman"/>
                 <a:sym typeface="Times New Roman"/>
               </a:rPr>
-              <a:t>Designed to allow data analysts and students to do interactive graphing, statistical analysis, and advanced math in a single, unified workspace.</a:t>
+              <a:t>Designed or students and data analysts who wants to do graphic, statistical analysis, and advanced math in a single, unified workspace.</a:t>
             </a:r>
           </a:p>
         </p:txBody>
@@ -6942,7 +6942,7 @@
         </p:nvSpPr>
         <p:spPr>
           <a:xfrm>
-            <a:off x="2286000" y="5386562"/>
+            <a:off x="2286000" y="5290156"/>
             <a:ext cx="8009930" cy="316818"/>
           </a:xfrm>
           <a:prstGeom prst="rect">
@@ -6970,7 +6970,7 @@
                 <a:cs typeface="Times New Roman"/>
                 <a:sym typeface="Times New Roman"/>
               </a:rPr>
-              <a:t>It aims for mathematical accuracy and a clean, comfortable user experience.</a:t>
+              <a:t>It aims for mathematical accuracy and a layout that is easy to use.</a:t>
             </a:r>
           </a:p>
         </p:txBody>
@@ -7502,20 +7502,6 @@
               </a:lnSpc>
             </a:pPr>
             <a:r>
-              <a:rPr lang="en-US" sz="1899" dirty="0" err="1">
-                <a:solidFill>
-                  <a:srgbClr val="000000">
-                    <a:alpha val="82745"/>
-                  </a:srgbClr>
-                </a:solidFill>
-                <a:latin typeface="Belleza"/>
-                <a:ea typeface="Belleza"/>
-                <a:cs typeface="Belleza"/>
-                <a:sym typeface="Belleza"/>
-              </a:rPr>
-              <a:t>CustomTkinter</a:t>
-            </a:r>
-            <a:r>
               <a:rPr lang="en-US" sz="1899" dirty="0">
                 <a:solidFill>
                   <a:srgbClr val="000000">
@@ -7527,7 +7513,7 @@
                 <a:cs typeface="Belleza"/>
                 <a:sym typeface="Belleza"/>
               </a:rPr>
-              <a:t>: Builds the main window, keypad and layout of the application.</a:t>
+              <a:t>CustomTkinter: Builds the main window, keypad and layout of the application.</a:t>
             </a:r>
           </a:p>
         </p:txBody>
@@ -7616,20 +7602,6 @@
               </a:lnSpc>
             </a:pPr>
             <a:r>
-              <a:rPr lang="en-US" sz="1899" dirty="0" err="1">
-                <a:solidFill>
-                  <a:srgbClr val="000000">
-                    <a:alpha val="82745"/>
-                  </a:srgbClr>
-                </a:solidFill>
-                <a:latin typeface="Belleza"/>
-                <a:ea typeface="Belleza"/>
-                <a:cs typeface="Belleza"/>
-                <a:sym typeface="Belleza"/>
-              </a:rPr>
-              <a:t>SymPy</a:t>
-            </a:r>
-            <a:r>
               <a:rPr lang="en-US" sz="1899" dirty="0">
                 <a:solidFill>
                   <a:srgbClr val="000000">
@@ -7641,7 +7613,7 @@
                 <a:cs typeface="Belleza"/>
                 <a:sym typeface="Belleza"/>
               </a:rPr>
-              <a:t>: Solves equations and handles symbolic </a:t>
+              <a:t>SymPy: Solves equations and handles symbolic </a:t>
             </a:r>
             <a:r>
               <a:rPr lang="en-US" sz="1899" dirty="0" err="1">
@@ -10792,31 +10764,7 @@
                 <a:cs typeface="Times New Roman Bold"/>
                 <a:sym typeface="Times New Roman Bold"/>
               </a:rPr>
-              <a:t>Scientific &amp; Advanced </a:t>
-            </a:r>
-            <a:r>
-              <a:rPr lang="en-US" sz="2199" b="1" dirty="0" err="1">
-                <a:solidFill>
-                  <a:srgbClr val="000000"/>
-                </a:solidFill>
-                <a:latin typeface="Times New Roman Bold"/>
-                <a:ea typeface="Times New Roman Bold"/>
-                <a:cs typeface="Times New Roman Bold"/>
-                <a:sym typeface="Times New Roman Bold"/>
-              </a:rPr>
-              <a:t>Modes</a:t>
-            </a:r>
-            <a:r>
-              <a:rPr lang="en-US" sz="2199" dirty="0" err="1">
-                <a:solidFill>
-                  <a:srgbClr val="000000"/>
-                </a:solidFill>
-                <a:latin typeface="Times New Roman"/>
-                <a:ea typeface="Times New Roman"/>
-                <a:cs typeface="Times New Roman"/>
-                <a:sym typeface="Times New Roman"/>
-              </a:rPr>
-              <a:t>:Can</a:t>
+              <a:t>Scientific &amp; Advanced Modes</a:t>
             </a:r>
             <a:r>
               <a:rPr lang="en-US" sz="2199" dirty="0">
@@ -10828,7 +10776,7 @@
                 <a:cs typeface="Times New Roman"/>
                 <a:sym typeface="Times New Roman"/>
               </a:rPr>
-              <a:t> perform trigonometric, logarithmic, power and root functions, along with nCr and nPr for combinations and permutations.</a:t>
+              <a:t>: Can perform trigonometric, logarithmic, power and root functions, along with nCr and nPr for combinations and permutations.</a:t>
             </a:r>
           </a:p>
         </p:txBody>
